--- a/BACKUP&RECOVERY/10장/10장_ARCHIVELOG_복구_불완전복구.pptx
+++ b/BACKUP&RECOVERY/10장/10장_ARCHIVELOG_복구_불완전복구.pptx
@@ -6340,7 +6340,7 @@
                 <a:latin typeface="Consolas"/>
                 <a:ea typeface="Consolas"/>
               </a:rPr>
-              <a:t>SYS@orcl&gt; !cp -p /home/oracle/backup/ch10/*.dbf /u02/oradata/ORCL/</a:t>
+              <a:t>SYS@orcl&gt; !cp -p /home/oracle/backup/ch10/*.dbf /u02/oradata/orcl/</a:t>
             </a:r>
           </a:p>
           <a:p>
@@ -7574,7 +7574,7 @@
                 <a:latin typeface="Consolas"/>
                 <a:ea typeface="Consolas"/>
               </a:rPr>
-              <a:t>SYS@orcl&gt; !cp -p /home/oracle/backup/ch10/*.dbf /u02/oradata/ORCL/</a:t>
+              <a:t>SYS@orcl&gt; !cp -p /home/oracle/backup/ch10/*.dbf /u02/oradata/orcl/</a:t>
             </a:r>
           </a:p>
           <a:p>
@@ -8399,7 +8399,7 @@
                 <a:latin typeface="Consolas"/>
                 <a:ea typeface="Consolas"/>
               </a:rPr>
-              <a:t>  2    DBMS_LOGMNR.ADD_LOGFILE('/u02/arch1/1_61_1200530011.dbf',</a:t>
+              <a:t>  2    DBMS_LOGMNR.ADD_LOGFILE('/home/oracle/arch1/arch_1_61_1200533800.arc',</a:t>
             </a:r>
           </a:p>
           <a:p>
@@ -12051,7 +12051,7 @@
                 <a:latin typeface="Consolas"/>
                 <a:ea typeface="Consolas"/>
               </a:rPr>
-              <a:t>ORA-00312: online log 3 thread 1: '/u01/app/oracle/oradata/ORCL/redo03.log'</a:t>
+              <a:t>ORA-00312: online log 3 thread 1: '/u01/app/oracle/oradata/orcl/redo03.log'</a:t>
             </a:r>
           </a:p>
           <a:p>
@@ -16567,7 +16567,7 @@
                 <a:latin typeface="Consolas"/>
                 <a:ea typeface="Consolas"/>
               </a:rPr>
-              <a:t>ORA-01110: data file 3: '/u02/oradata/ORCL/sysaux01.dbf'</a:t>
+              <a:t>ORA-01110: data file 3: '/u01/app/oracle/oradata/orcl/sysaux01.dbf'</a:t>
             </a:r>
           </a:p>
           <a:p>
